--- a/nyc_payroll_presentation.pptx
+++ b/nyc_payroll_presentation.pptx
@@ -852,7 +852,7 @@
             <a:fld id="{B61BEF0D-F0BB-DE4B-95CE-6DB70DBA9567}" type="datetimeFigureOut">
               <a:rPr lang="en-US"/>
               <a:pPr/>
-              <a:t>5/6/2026</a:t>
+              <a:t>5/14/2026</a:t>
             </a:fld>
             <a:endParaRPr lang="en-US"/>
           </a:p>
@@ -1100,7 +1100,7 @@
             <a:fld id="{B61BEF0D-F0BB-DE4B-95CE-6DB70DBA9567}" type="datetimeFigureOut">
               <a:rPr lang="en-US"/>
               <a:pPr/>
-              <a:t>5/6/2026</a:t>
+              <a:t>5/14/2026</a:t>
             </a:fld>
             <a:endParaRPr lang="en-US"/>
           </a:p>
@@ -1411,7 +1411,7 @@
             <a:fld id="{B61BEF0D-F0BB-DE4B-95CE-6DB70DBA9567}" type="datetimeFigureOut">
               <a:rPr lang="en-US"/>
               <a:pPr/>
-              <a:t>5/6/2026</a:t>
+              <a:t>5/14/2026</a:t>
             </a:fld>
             <a:endParaRPr lang="en-US"/>
           </a:p>
@@ -1749,7 +1749,7 @@
             <a:fld id="{B61BEF0D-F0BB-DE4B-95CE-6DB70DBA9567}" type="datetimeFigureOut">
               <a:rPr lang="en-US"/>
               <a:pPr/>
-              <a:t>5/6/2026</a:t>
+              <a:t>5/14/2026</a:t>
             </a:fld>
             <a:endParaRPr lang="en-US"/>
           </a:p>
@@ -2060,7 +2060,7 @@
             <a:fld id="{B61BEF0D-F0BB-DE4B-95CE-6DB70DBA9567}" type="datetimeFigureOut">
               <a:rPr lang="en-US"/>
               <a:pPr/>
-              <a:t>5/6/2026</a:t>
+              <a:t>5/14/2026</a:t>
             </a:fld>
             <a:endParaRPr lang="en-US"/>
           </a:p>
@@ -2450,7 +2450,7 @@
             <a:fld id="{B61BEF0D-F0BB-DE4B-95CE-6DB70DBA9567}" type="datetimeFigureOut">
               <a:rPr lang="en-US"/>
               <a:pPr/>
-              <a:t>5/6/2026</a:t>
+              <a:t>5/14/2026</a:t>
             </a:fld>
             <a:endParaRPr lang="en-US"/>
           </a:p>
@@ -2616,7 +2616,7 @@
           <a:p>
             <a:fld id="{55C6B4A9-1611-4792-9094-5F34BCA07E0B}" type="datetimeFigureOut">
               <a:rPr lang="en-US"/>
-              <a:t>5/6/2026</a:t>
+              <a:t>5/14/2026</a:t>
             </a:fld>
             <a:endParaRPr lang="en-US"/>
           </a:p>
@@ -2792,7 +2792,7 @@
             <a:fld id="{B61BEF0D-F0BB-DE4B-95CE-6DB70DBA9567}" type="datetimeFigureOut">
               <a:rPr lang="en-US"/>
               <a:pPr/>
-              <a:t>5/6/2026</a:t>
+              <a:t>5/14/2026</a:t>
             </a:fld>
             <a:endParaRPr lang="en-US"/>
           </a:p>
@@ -2965,7 +2965,7 @@
             <a:fld id="{B61BEF0D-F0BB-DE4B-95CE-6DB70DBA9567}" type="datetimeFigureOut">
               <a:rPr lang="en-US"/>
               <a:pPr/>
-              <a:t>5/6/2026</a:t>
+              <a:t>5/14/2026</a:t>
             </a:fld>
             <a:endParaRPr lang="en-US"/>
           </a:p>
@@ -3209,7 +3209,7 @@
             <a:fld id="{B61BEF0D-F0BB-DE4B-95CE-6DB70DBA9567}" type="datetimeFigureOut">
               <a:rPr lang="en-US"/>
               <a:pPr/>
-              <a:t>5/6/2026</a:t>
+              <a:t>5/14/2026</a:t>
             </a:fld>
             <a:endParaRPr lang="en-US"/>
           </a:p>
@@ -3437,7 +3437,7 @@
           <a:p>
             <a:fld id="{EB712588-04B1-427B-82EE-E8DB90309F08}" type="datetimeFigureOut">
               <a:rPr lang="en-US"/>
-              <a:t>5/6/2026</a:t>
+              <a:t>5/14/2026</a:t>
             </a:fld>
             <a:endParaRPr lang="en-US"/>
           </a:p>
@@ -3807,7 +3807,7 @@
             <a:fld id="{B61BEF0D-F0BB-DE4B-95CE-6DB70DBA9567}" type="datetimeFigureOut">
               <a:rPr lang="en-US"/>
               <a:pPr/>
-              <a:t>5/6/2026</a:t>
+              <a:t>5/14/2026</a:t>
             </a:fld>
             <a:endParaRPr lang="en-US"/>
           </a:p>
@@ -3927,7 +3927,7 @@
             <a:fld id="{B61BEF0D-F0BB-DE4B-95CE-6DB70DBA9567}" type="datetimeFigureOut">
               <a:rPr lang="en-US"/>
               <a:pPr/>
-              <a:t>5/6/2026</a:t>
+              <a:t>5/14/2026</a:t>
             </a:fld>
             <a:endParaRPr lang="en-US"/>
           </a:p>
@@ -4019,7 +4019,7 @@
             <a:fld id="{B61BEF0D-F0BB-DE4B-95CE-6DB70DBA9567}" type="datetimeFigureOut">
               <a:rPr lang="en-US"/>
               <a:pPr/>
-              <a:t>5/6/2026</a:t>
+              <a:t>5/14/2026</a:t>
             </a:fld>
             <a:endParaRPr lang="en-US"/>
           </a:p>
@@ -4270,7 +4270,7 @@
           <a:p>
             <a:fld id="{42A54C80-263E-416B-A8E0-580EDEADCBDC}" type="datetimeFigureOut">
               <a:rPr lang="en-US"/>
-              <a:t>5/6/2026</a:t>
+              <a:t>5/14/2026</a:t>
             </a:fld>
             <a:endParaRPr lang="en-US"/>
           </a:p>
@@ -4529,7 +4529,7 @@
             <a:fld id="{B61BEF0D-F0BB-DE4B-95CE-6DB70DBA9567}" type="datetimeFigureOut">
               <a:rPr lang="en-US"/>
               <a:pPr/>
-              <a:t>5/6/2026</a:t>
+              <a:t>5/14/2026</a:t>
             </a:fld>
             <a:endParaRPr lang="en-US"/>
           </a:p>
@@ -5269,7 +5269,7 @@
             <a:fld id="{B61BEF0D-F0BB-DE4B-95CE-6DB70DBA9567}" type="datetimeFigureOut">
               <a:rPr lang="en-US"/>
               <a:pPr/>
-              <a:t>5/6/2026</a:t>
+              <a:t>5/14/2026</a:t>
             </a:fld>
             <a:endParaRPr lang="en-US"/>
           </a:p>
@@ -5894,8 +5894,12 @@
               <a:t>Date</a:t>
             </a:r>
             <a:r>
-              <a:rPr lang="en-GB" dirty="0"/>
-              <a:t>: April 2026 </a:t>
+              <a:rPr lang="en-GB"/>
+              <a:t>: </a:t>
+            </a:r>
+            <a:r>
+              <a:rPr lang="en-GB" smtClean="0"/>
+              <a:t>May 15, 2026</a:t>
             </a:r>
             <a:endParaRPr lang="en-GB" dirty="0" smtClean="0"/>
           </a:p>
@@ -6351,7 +6355,7 @@
           <a:lstStyle/>
           <a:p>
             <a:r>
-              <a:rPr lang="en-US" sz="1200" b="1" smtClean="0">
+              <a:rPr lang="en-US" sz="1200" b="1" dirty="0" smtClean="0">
                 <a:solidFill>
                   <a:srgbClr val="1B4332"/>
                 </a:solidFill>
@@ -6363,7 +6367,7 @@
             </a:r>
           </a:p>
           <a:p>
-            <a:endParaRPr lang="en-GB" sz="1200" b="1">
+            <a:endParaRPr lang="en-GB" sz="1200" b="1" dirty="0">
               <a:solidFill>
                 <a:srgbClr val="1B4332"/>
               </a:solidFill>
@@ -6373,7 +6377,7 @@
           </a:p>
           <a:p>
             <a:r>
-              <a:rPr lang="en-GB" sz="1200" b="1" smtClean="0">
+              <a:rPr lang="en-GB" sz="1200" b="1" dirty="0" smtClean="0">
                 <a:solidFill>
                   <a:srgbClr val="1B4332"/>
                 </a:solidFill>
@@ -6383,7 +6387,7 @@
               <a:t>		</a:t>
             </a:r>
             <a:r>
-              <a:rPr lang="en-US" sz="1200">
+              <a:rPr lang="en-US" sz="1200" dirty="0">
                 <a:solidFill>
                   <a:srgbClr val="6C757D"/>
                 </a:solidFill>
@@ -6393,10 +6397,10 @@
               </a:rPr>
               <a:t>Install required Python package</a:t>
             </a:r>
-            <a:endParaRPr lang="en-US" sz="1200"/>
-          </a:p>
-          <a:p>
-            <a:endParaRPr lang="en-GB" sz="1200" b="1" smtClean="0">
+            <a:endParaRPr lang="en-US" sz="1200" dirty="0"/>
+          </a:p>
+          <a:p>
+            <a:endParaRPr lang="en-GB" sz="1200" b="1" dirty="0" smtClean="0">
               <a:solidFill>
                 <a:srgbClr val="1B4332"/>
               </a:solidFill>
@@ -6406,7 +6410,7 @@
           </a:p>
           <a:p>
             <a:r>
-              <a:rPr lang="en-US" sz="1200">
+              <a:rPr lang="en-US" sz="1200" dirty="0">
                 <a:solidFill>
                   <a:schemeClr val="tx1">
                     <a:lumMod val="85000"/>
@@ -6417,9 +6421,23 @@
                 <a:ea typeface="Consolas" pitchFamily="34" charset="-122"/>
                 <a:cs typeface="Consolas" pitchFamily="34" charset="-120"/>
               </a:rPr>
-              <a:t>pip install psycopg2</a:t>
-            </a:r>
-            <a:endParaRPr lang="en-US" sz="1200">
+              <a:t>pip install </a:t>
+            </a:r>
+            <a:r>
+              <a:rPr lang="en-US" sz="1200" dirty="0" smtClean="0">
+                <a:solidFill>
+                  <a:schemeClr val="tx1">
+                    <a:lumMod val="85000"/>
+                    <a:lumOff val="15000"/>
+                  </a:schemeClr>
+                </a:solidFill>
+                <a:latin typeface="Consolas" pitchFamily="34" charset="0"/>
+                <a:ea typeface="Consolas" pitchFamily="34" charset="-122"/>
+                <a:cs typeface="Consolas" pitchFamily="34" charset="-120"/>
+              </a:rPr>
+              <a:t>psycopg2</a:t>
+            </a:r>
+            <a:endParaRPr lang="en-US" sz="1200" dirty="0">
               <a:solidFill>
                 <a:schemeClr val="tx1">
                   <a:lumMod val="85000"/>
@@ -6429,7 +6447,7 @@
             </a:endParaRPr>
           </a:p>
           <a:p>
-            <a:endParaRPr lang="en-GB" sz="1200" b="1">
+            <a:endParaRPr lang="en-GB" sz="1200" b="1" dirty="0">
               <a:solidFill>
                 <a:srgbClr val="1B4332"/>
               </a:solidFill>
@@ -6438,7 +6456,7 @@
             </a:endParaRPr>
           </a:p>
           <a:p>
-            <a:endParaRPr lang="en-US" sz="1200"/>
+            <a:endParaRPr lang="en-US" sz="1200" dirty="0"/>
           </a:p>
         </p:txBody>
       </p:sp>
@@ -7660,7 +7678,7 @@
         <p:spPr>
           <a:xfrm>
             <a:off x="2908678" y="4996934"/>
-            <a:ext cx="3587970" cy="369332"/>
+            <a:ext cx="3681457" cy="369332"/>
           </a:xfrm>
           <a:prstGeom prst="rect">
             <a:avLst/>
@@ -7674,15 +7692,7 @@
           <a:p>
             <a:r>
               <a:rPr lang="en-US" dirty="0" smtClean="0"/>
-              <a:t>Figure </a:t>
-            </a:r>
-            <a:r>
-              <a:rPr lang="en-US" dirty="0"/>
-              <a:t>4</a:t>
-            </a:r>
-            <a:r>
-              <a:rPr lang="en-US" dirty="0" smtClean="0"/>
-              <a:t>:Terminal </a:t>
+              <a:t>Figure 4: Terminal </a:t>
             </a:r>
             <a:r>
               <a:rPr lang="en-US" dirty="0"/>
@@ -9596,7 +9606,7 @@
               <a:buNone/>
             </a:pPr>
             <a:r>
-              <a:rPr lang="en-US" b="1" smtClean="0">
+              <a:rPr lang="en-US" b="1" dirty="0" smtClean="0">
                 <a:solidFill>
                   <a:srgbClr val="1B4332"/>
                 </a:solidFill>
@@ -9607,7 +9617,7 @@
               <a:t>	Key </a:t>
             </a:r>
             <a:r>
-              <a:rPr lang="en-US" b="1">
+              <a:rPr lang="en-US" b="1" dirty="0">
                 <a:solidFill>
                   <a:srgbClr val="1B4332"/>
                 </a:solidFill>
@@ -9618,7 +9628,7 @@
               <a:t>Solutions </a:t>
             </a:r>
             <a:r>
-              <a:rPr lang="en-US" b="1" smtClean="0">
+              <a:rPr lang="en-US" b="1" dirty="0" smtClean="0">
                 <a:solidFill>
                   <a:srgbClr val="1B4332"/>
                 </a:solidFill>
@@ -9629,7 +9639,7 @@
               <a:t>Applied									</a:t>
             </a:r>
             <a:r>
-              <a:rPr lang="en-US" b="1">
+              <a:rPr lang="en-US" b="1" dirty="0">
                 <a:solidFill>
                   <a:srgbClr val="1B4332"/>
                 </a:solidFill>
@@ -9639,13 +9649,13 @@
               </a:rPr>
               <a:t>What I Learned</a:t>
             </a:r>
-            <a:endParaRPr lang="en-US"/>
+            <a:endParaRPr lang="en-US" dirty="0"/>
           </a:p>
           <a:p>
             <a:pPr marL="0" indent="0">
               <a:buNone/>
             </a:pPr>
-            <a:endParaRPr lang="en-US" b="1" smtClean="0">
+            <a:endParaRPr lang="en-US" b="1" dirty="0" smtClean="0">
               <a:solidFill>
                 <a:srgbClr val="1B4332"/>
               </a:solidFill>
@@ -9658,10 +9668,10 @@
             <a:pPr marL="0" indent="0">
               <a:buNone/>
             </a:pPr>
-            <a:endParaRPr lang="en-US"/>
-          </a:p>
-          <a:p>
-            <a:endParaRPr lang="en-US"/>
+            <a:endParaRPr lang="en-US" dirty="0"/>
+          </a:p>
+          <a:p>
+            <a:endParaRPr lang="en-US" dirty="0"/>
           </a:p>
         </p:txBody>
       </p:sp>
@@ -10364,7 +10374,7 @@
               <a:buChar char="§"/>
             </a:pPr>
             <a:r>
-              <a:rPr lang="en-US" sz="1200" smtClean="0">
+              <a:rPr lang="en-US" sz="1200" dirty="0" smtClean="0">
                 <a:solidFill>
                   <a:srgbClr val="212529"/>
                 </a:solidFill>
@@ -10375,7 +10385,7 @@
               <a:t>Why </a:t>
             </a:r>
             <a:r>
-              <a:rPr lang="en-US" sz="1200">
+              <a:rPr lang="en-US" sz="1200" dirty="0">
                 <a:solidFill>
                   <a:srgbClr val="212529"/>
                 </a:solidFill>
@@ -10385,10 +10395,10 @@
               </a:rPr>
               <a:t>data profiling is essential BEFORE building any pipeline</a:t>
             </a:r>
-            <a:endParaRPr lang="en-US" sz="1200"/>
-          </a:p>
-          <a:p>
-            <a:endParaRPr lang="en-US"/>
+            <a:endParaRPr lang="en-US" sz="1200" dirty="0"/>
+          </a:p>
+          <a:p>
+            <a:endParaRPr lang="en-US" dirty="0"/>
           </a:p>
         </p:txBody>
       </p:sp>
@@ -10431,7 +10441,7 @@
               <a:buChar char="§"/>
             </a:pPr>
             <a:r>
-              <a:rPr lang="en-US" sz="1200" smtClean="0">
+              <a:rPr lang="en-US" sz="1200" dirty="0" smtClean="0">
                 <a:solidFill>
                   <a:srgbClr val="212529"/>
                 </a:solidFill>
@@ -10439,23 +10449,12 @@
                 <a:ea typeface="Calibri" pitchFamily="34" charset="-122"/>
                 <a:cs typeface="Calibri" pitchFamily="34" charset="-120"/>
               </a:rPr>
-              <a:t>How </a:t>
-            </a:r>
-            <a:r>
-              <a:rPr lang="en-US" sz="1200">
-                <a:solidFill>
-                  <a:srgbClr val="212529"/>
-                </a:solidFill>
-                <a:latin typeface="Calibri" pitchFamily="34" charset="0"/>
-                <a:ea typeface="Calibri" pitchFamily="34" charset="-122"/>
-                <a:cs typeface="Calibri" pitchFamily="34" charset="-120"/>
-              </a:rPr>
-              <a:t>Star Schema enables fast analytical queries on large datasets</a:t>
-            </a:r>
-            <a:endParaRPr lang="en-US" sz="1200"/>
-          </a:p>
-          <a:p>
-            <a:endParaRPr lang="en-US"/>
+              <a:t>How Star Schema makes queries much faster on large datasets</a:t>
+            </a:r>
+            <a:endParaRPr lang="en-US" sz="1200" dirty="0" smtClean="0"/>
+          </a:p>
+          <a:p>
+            <a:endParaRPr lang="en-US" dirty="0"/>
           </a:p>
         </p:txBody>
       </p:sp>
@@ -10881,8 +10880,8 @@
               <a:rPr lang="en-GB" sz="1200" dirty="0">
                 <a:solidFill>
                   <a:schemeClr val="tx1">
-                    <a:lumMod val="85000"/>
-                    <a:lumOff val="15000"/>
+                    <a:lumMod val="95000"/>
+                    <a:lumOff val="5000"/>
                   </a:schemeClr>
                 </a:solidFill>
               </a:rPr>
@@ -10891,8 +10890,8 @@
             <a:endParaRPr lang="en-US" sz="1200" dirty="0">
               <a:solidFill>
                 <a:schemeClr val="tx1">
-                  <a:lumMod val="85000"/>
-                  <a:lumOff val="15000"/>
+                  <a:lumMod val="95000"/>
+                  <a:lumOff val="5000"/>
                 </a:schemeClr>
               </a:solidFill>
             </a:endParaRPr>
@@ -10940,14 +10939,9 @@
               <a:t>05 </a:t>
             </a:r>
             <a:r>
-              <a:rPr lang="en-GB" sz="1200" dirty="0" err="1" smtClean="0"/>
-              <a:t>Github</a:t>
-            </a:r>
-            <a:r>
-              <a:rPr lang="en-GB" sz="1200" dirty="0" smtClean="0"/>
-              <a:t> Documentation</a:t>
-            </a:r>
-            <a:endParaRPr lang="en-US" sz="1200" dirty="0"/>
+              <a:rPr lang="en-US" sz="1200" dirty="0"/>
+              <a:t>Cloud Migration</a:t>
+            </a:r>
           </a:p>
         </p:txBody>
       </p:sp>
@@ -11131,7 +11125,6 @@
               <a:rPr lang="en-US" sz="1200" dirty="0"/>
               <a:t>Slowly Changing Dimensions (SCD)</a:t>
             </a:r>
-            <a:endParaRPr lang="en-US" sz="1200" dirty="0"/>
           </a:p>
         </p:txBody>
       </p:sp>
@@ -11179,7 +11172,10 @@
             <a:r>
               <a:rPr lang="en-US" sz="1200" dirty="0">
                 <a:solidFill>
-                  <a:srgbClr val="212529"/>
+                  <a:schemeClr val="tx1">
+                    <a:lumMod val="95000"/>
+                    <a:lumOff val="5000"/>
+                  </a:schemeClr>
                 </a:solidFill>
                 <a:latin typeface="Calibri" pitchFamily="34" charset="0"/>
                 <a:ea typeface="Calibri" pitchFamily="34" charset="-122"/>
@@ -11187,7 +11183,14 @@
               </a:rPr>
               <a:t>Connect Power BI or Tableau to the PostgreSQL warehouse to create interactive dashboards showing salary trends and agency comparisons</a:t>
             </a:r>
-            <a:endParaRPr lang="en-US" sz="1200" dirty="0"/>
+            <a:endParaRPr lang="en-US" sz="1200" dirty="0">
+              <a:solidFill>
+                <a:schemeClr val="tx1">
+                  <a:lumMod val="95000"/>
+                  <a:lumOff val="5000"/>
+                </a:schemeClr>
+              </a:solidFill>
+            </a:endParaRPr>
           </a:p>
         </p:txBody>
       </p:sp>
@@ -11235,7 +11238,10 @@
             <a:r>
               <a:rPr lang="en-US" sz="1200" dirty="0">
                 <a:solidFill>
-                  <a:srgbClr val="212529"/>
+                  <a:schemeClr val="tx1">
+                    <a:lumMod val="95000"/>
+                    <a:lumOff val="5000"/>
+                  </a:schemeClr>
                 </a:solidFill>
                 <a:latin typeface="Calibri" pitchFamily="34" charset="0"/>
                 <a:ea typeface="Calibri" pitchFamily="34" charset="-122"/>
@@ -11243,7 +11249,14 @@
               </a:rPr>
               <a:t>Add automated checks in staging to catch bad data early — validate salary ranges, check date formats, flag anomalies before loading.</a:t>
             </a:r>
-            <a:endParaRPr lang="en-US" sz="1200" dirty="0"/>
+            <a:endParaRPr lang="en-US" sz="1200" dirty="0">
+              <a:solidFill>
+                <a:schemeClr val="tx1">
+                  <a:lumMod val="95000"/>
+                  <a:lumOff val="5000"/>
+                </a:schemeClr>
+              </a:solidFill>
+            </a:endParaRPr>
           </a:p>
         </p:txBody>
       </p:sp>
@@ -11292,8 +11305,8 @@
               <a:rPr lang="en-GB" sz="1200" dirty="0">
                 <a:solidFill>
                   <a:schemeClr val="tx1">
-                    <a:lumMod val="85000"/>
-                    <a:lumOff val="15000"/>
+                    <a:lumMod val="95000"/>
+                    <a:lumOff val="5000"/>
                   </a:schemeClr>
                 </a:solidFill>
                 <a:latin typeface="Calibri" panose="020F0502020204030204" pitchFamily="34" charset="0"/>
@@ -11304,8 +11317,8 @@
             <a:endParaRPr lang="en-US" sz="1200" dirty="0">
               <a:solidFill>
                 <a:schemeClr val="tx1">
-                  <a:lumMod val="85000"/>
-                  <a:lumOff val="15000"/>
+                  <a:lumMod val="95000"/>
+                  <a:lumOff val="5000"/>
                 </a:schemeClr>
               </a:solidFill>
               <a:latin typeface="Calibri" panose="020F0502020204030204" pitchFamily="34" charset="0"/>
@@ -11358,26 +11371,53 @@
             <a:r>
               <a:rPr lang="en-US" sz="1200" dirty="0" smtClean="0">
                 <a:solidFill>
-                  <a:srgbClr val="212529"/>
-                </a:solidFill>
-                <a:latin typeface="Calibri" pitchFamily="34" charset="0"/>
-                <a:ea typeface="Calibri" pitchFamily="34" charset="-122"/>
-                <a:cs typeface="Calibri" pitchFamily="34" charset="-120"/>
-              </a:rPr>
-              <a:t>Upload </a:t>
-            </a:r>
-            <a:r>
-              <a:rPr lang="en-US" sz="1200" dirty="0">
-                <a:solidFill>
-                  <a:srgbClr val="212529"/>
-                </a:solidFill>
-                <a:latin typeface="Calibri" pitchFamily="34" charset="0"/>
-                <a:ea typeface="Calibri" pitchFamily="34" charset="-122"/>
-                <a:cs typeface="Calibri" pitchFamily="34" charset="-120"/>
-              </a:rPr>
-              <a:t>complete project to GitHub with detailed README, setup instructions and architecture diagrams for portfolio showcase</a:t>
-            </a:r>
-            <a:endParaRPr lang="en-US" sz="1200" dirty="0"/>
+                  <a:schemeClr val="tx1">
+                    <a:lumMod val="95000"/>
+                    <a:lumOff val="5000"/>
+                  </a:schemeClr>
+                </a:solidFill>
+                <a:latin typeface="Calibri" pitchFamily="34" charset="0"/>
+                <a:ea typeface="Calibri" pitchFamily="34" charset="-122"/>
+                <a:cs typeface="Calibri" pitchFamily="34" charset="-120"/>
+              </a:rPr>
+              <a:t>Migrate the pipeline to the cloud using AWS S3 + Redshift or Google </a:t>
+            </a:r>
+            <a:r>
+              <a:rPr lang="en-US" sz="1200" dirty="0" err="1" smtClean="0">
+                <a:solidFill>
+                  <a:schemeClr val="tx1">
+                    <a:lumMod val="95000"/>
+                    <a:lumOff val="5000"/>
+                  </a:schemeClr>
+                </a:solidFill>
+                <a:latin typeface="Calibri" pitchFamily="34" charset="0"/>
+                <a:ea typeface="Calibri" pitchFamily="34" charset="-122"/>
+                <a:cs typeface="Calibri" pitchFamily="34" charset="-120"/>
+              </a:rPr>
+              <a:t>BigQuery</a:t>
+            </a:r>
+            <a:r>
+              <a:rPr lang="en-US" sz="1200" dirty="0" smtClean="0">
+                <a:solidFill>
+                  <a:schemeClr val="tx1">
+                    <a:lumMod val="95000"/>
+                    <a:lumOff val="5000"/>
+                  </a:schemeClr>
+                </a:solidFill>
+                <a:latin typeface="Calibri" pitchFamily="34" charset="0"/>
+                <a:ea typeface="Calibri" pitchFamily="34" charset="-122"/>
+                <a:cs typeface="Calibri" pitchFamily="34" charset="-120"/>
+              </a:rPr>
+              <a:t> for scalable storage and faster queries on large datasets.</a:t>
+            </a:r>
+            <a:endParaRPr lang="en-US" sz="1200" dirty="0">
+              <a:solidFill>
+                <a:schemeClr val="tx1">
+                  <a:lumMod val="95000"/>
+                  <a:lumOff val="5000"/>
+                </a:schemeClr>
+              </a:solidFill>
+            </a:endParaRPr>
           </a:p>
         </p:txBody>
       </p:sp>
@@ -11425,7 +11465,10 @@
             <a:r>
               <a:rPr lang="en-US" sz="1200" dirty="0">
                 <a:solidFill>
-                  <a:srgbClr val="212529"/>
+                  <a:schemeClr val="tx1">
+                    <a:lumMod val="95000"/>
+                    <a:lumOff val="5000"/>
+                  </a:schemeClr>
                 </a:solidFill>
                 <a:latin typeface="Calibri" pitchFamily="34" charset="0"/>
                 <a:ea typeface="Calibri" pitchFamily="34" charset="-122"/>
@@ -11436,7 +11479,10 @@
             <a:r>
               <a:rPr lang="en-US" sz="1200" dirty="0" err="1">
                 <a:solidFill>
-                  <a:srgbClr val="212529"/>
+                  <a:schemeClr val="tx1">
+                    <a:lumMod val="95000"/>
+                    <a:lumOff val="5000"/>
+                  </a:schemeClr>
                 </a:solidFill>
                 <a:latin typeface="Calibri" pitchFamily="34" charset="0"/>
                 <a:ea typeface="Calibri" pitchFamily="34" charset="-122"/>
@@ -11447,7 +11493,10 @@
             <a:r>
               <a:rPr lang="en-US" sz="1200" dirty="0">
                 <a:solidFill>
-                  <a:srgbClr val="212529"/>
+                  <a:schemeClr val="tx1">
+                    <a:lumMod val="95000"/>
+                    <a:lumOff val="5000"/>
+                  </a:schemeClr>
                 </a:solidFill>
                 <a:latin typeface="Calibri" pitchFamily="34" charset="0"/>
                 <a:ea typeface="Calibri" pitchFamily="34" charset="-122"/>
@@ -11458,7 +11507,10 @@
             <a:r>
               <a:rPr lang="en-US" sz="1200" dirty="0" err="1">
                 <a:solidFill>
-                  <a:srgbClr val="212529"/>
+                  <a:schemeClr val="tx1">
+                    <a:lumMod val="95000"/>
+                    <a:lumOff val="5000"/>
+                  </a:schemeClr>
                 </a:solidFill>
                 <a:latin typeface="Calibri" pitchFamily="34" charset="0"/>
                 <a:ea typeface="Calibri" pitchFamily="34" charset="-122"/>
@@ -11469,7 +11521,10 @@
             <a:r>
               <a:rPr lang="en-US" sz="1200" dirty="0">
                 <a:solidFill>
-                  <a:srgbClr val="212529"/>
+                  <a:schemeClr val="tx1">
+                    <a:lumMod val="95000"/>
+                    <a:lumOff val="5000"/>
+                  </a:schemeClr>
                 </a:solidFill>
                 <a:latin typeface="Calibri" pitchFamily="34" charset="0"/>
                 <a:ea typeface="Calibri" pitchFamily="34" charset="-122"/>
@@ -11477,7 +11532,14 @@
               </a:rPr>
               <a:t>() in psycopg2 for faster bulk inserts.</a:t>
             </a:r>
-            <a:endParaRPr lang="en-US" sz="1200" dirty="0"/>
+            <a:endParaRPr lang="en-US" sz="1200" dirty="0">
+              <a:solidFill>
+                <a:schemeClr val="tx1">
+                  <a:lumMod val="95000"/>
+                  <a:lumOff val="5000"/>
+                </a:schemeClr>
+              </a:solidFill>
+            </a:endParaRPr>
           </a:p>
         </p:txBody>
       </p:sp>
@@ -11578,7 +11640,7 @@
               <a:buNone/>
             </a:pPr>
             <a:r>
-              <a:rPr lang="en-US" b="1">
+              <a:rPr lang="en-US" b="1" dirty="0">
                 <a:solidFill>
                   <a:srgbClr val="1B4332"/>
                 </a:solidFill>
@@ -11589,7 +11651,7 @@
               <a:t>Key </a:t>
             </a:r>
             <a:r>
-              <a:rPr lang="en-US" b="1" smtClean="0">
+              <a:rPr lang="en-US" b="1" dirty="0" smtClean="0">
                 <a:solidFill>
                   <a:srgbClr val="1B4332"/>
                 </a:solidFill>
@@ -11604,7 +11666,7 @@
             <a:pPr marL="0" indent="0">
               <a:buNone/>
             </a:pPr>
-            <a:endParaRPr lang="en-GB" b="1">
+            <a:endParaRPr lang="en-GB" b="1" dirty="0">
               <a:solidFill>
                 <a:srgbClr val="1B4332"/>
               </a:solidFill>
@@ -11616,7 +11678,7 @@
             <a:pPr marL="0" indent="0">
               <a:buNone/>
             </a:pPr>
-            <a:endParaRPr lang="en-GB" b="1" smtClean="0">
+            <a:endParaRPr lang="en-GB" b="1" dirty="0" smtClean="0">
               <a:solidFill>
                 <a:srgbClr val="1B4332"/>
               </a:solidFill>
@@ -11628,7 +11690,7 @@
             <a:pPr marL="0" indent="0">
               <a:buNone/>
             </a:pPr>
-            <a:endParaRPr lang="en-GB" b="1" smtClean="0">
+            <a:endParaRPr lang="en-GB" b="1" dirty="0" smtClean="0">
               <a:solidFill>
                 <a:srgbClr val="1B4332"/>
               </a:solidFill>
@@ -11641,7 +11703,7 @@
               <a:buNone/>
             </a:pPr>
             <a:r>
-              <a:rPr lang="en-GB" b="1" smtClean="0">
+              <a:rPr lang="en-GB" b="1" dirty="0" smtClean="0">
                 <a:solidFill>
                   <a:srgbClr val="1B4332"/>
                 </a:solidFill>
@@ -11655,7 +11717,7 @@
             <a:pPr marL="0" indent="0">
               <a:buNone/>
             </a:pPr>
-            <a:endParaRPr lang="en-US"/>
+            <a:endParaRPr lang="en-US" dirty="0"/>
           </a:p>
         </p:txBody>
       </p:sp>
@@ -11853,17 +11915,17 @@
           <a:p>
             <a:pPr algn="ctr"/>
             <a:r>
-              <a:rPr lang="en-GB" smtClean="0"/>
+              <a:rPr lang="en-GB" dirty="0" smtClean="0"/>
               <a:t>145M hrs</a:t>
             </a:r>
           </a:p>
           <a:p>
             <a:pPr algn="ctr"/>
             <a:r>
-              <a:rPr lang="en-GB" sz="1600" smtClean="0"/>
+              <a:rPr lang="en-GB" sz="1600" dirty="0" smtClean="0"/>
               <a:t>Total OT Hours</a:t>
             </a:r>
-            <a:endParaRPr lang="en-US" sz="1600"/>
+            <a:endParaRPr lang="en-US" sz="1600" dirty="0"/>
           </a:p>
         </p:txBody>
       </p:sp>
@@ -12651,8 +12713,8 @@
         </p:nvSpPr>
         <p:spPr>
           <a:xfrm>
-            <a:off x="3187741" y="5911334"/>
-            <a:ext cx="2590774" cy="369332"/>
+            <a:off x="3736380" y="5455263"/>
+            <a:ext cx="2650341" cy="369332"/>
           </a:xfrm>
           <a:prstGeom prst="rect">
             <a:avLst/>
@@ -12666,20 +12728,17 @@
           <a:p>
             <a:r>
               <a:rPr lang="en-US" dirty="0" smtClean="0"/>
-              <a:t>Figure </a:t>
+              <a:t>Figure 5: Record </a:t>
+            </a:r>
+            <a:r>
+              <a:rPr lang="en-US" dirty="0"/>
+              <a:t>C</a:t>
             </a:r>
             <a:r>
               <a:rPr lang="en-US" dirty="0" smtClean="0"/>
-              <a:t>5: </a:t>
-            </a:r>
-            <a:r>
-              <a:rPr lang="en-US" dirty="0" smtClean="0"/>
-              <a:t>record </a:t>
-            </a:r>
-            <a:r>
-              <a:rPr lang="en-US" dirty="0"/>
-              <a:t>counts</a:t>
-            </a:r>
+              <a:t>ounts</a:t>
+            </a:r>
+            <a:endParaRPr lang="en-US" dirty="0"/>
           </a:p>
         </p:txBody>
       </p:sp>
@@ -12705,7 +12764,7 @@
         </p:blipFill>
         <p:spPr>
           <a:xfrm>
-            <a:off x="3187741" y="1104900"/>
+            <a:off x="3435935" y="1039585"/>
             <a:ext cx="3924300" cy="4241799"/>
           </a:xfrm>
           <a:prstGeom prst="rect">
@@ -12885,7 +12944,29 @@
                 <a:ea typeface="Calibri" pitchFamily="34" charset="-122"/>
                 <a:cs typeface="Calibri" pitchFamily="34" charset="-120"/>
               </a:rPr>
-              <a:t>by: Manoj Adhikari  |  LeapFrog Connect  |  April 2026</a:t>
+              <a:t>by: Manoj Adhikari  |  LeapFrog Connect  |  </a:t>
+            </a:r>
+            <a:r>
+              <a:rPr lang="en-US" dirty="0" smtClean="0">
+                <a:solidFill>
+                  <a:schemeClr val="bg1"/>
+                </a:solidFill>
+                <a:latin typeface="Calibri" pitchFamily="34" charset="0"/>
+                <a:ea typeface="Calibri" pitchFamily="34" charset="-122"/>
+                <a:cs typeface="Calibri" pitchFamily="34" charset="-120"/>
+              </a:rPr>
+              <a:t>May 15, </a:t>
+            </a:r>
+            <a:r>
+              <a:rPr lang="en-US" dirty="0">
+                <a:solidFill>
+                  <a:schemeClr val="bg1"/>
+                </a:solidFill>
+                <a:latin typeface="Calibri" pitchFamily="34" charset="0"/>
+                <a:ea typeface="Calibri" pitchFamily="34" charset="-122"/>
+                <a:cs typeface="Calibri" pitchFamily="34" charset="-120"/>
+              </a:rPr>
+              <a:t>2026</a:t>
             </a:r>
             <a:endParaRPr lang="en-US" dirty="0">
               <a:solidFill>
@@ -13923,7 +14004,7 @@
                         <a:defRPr/>
                       </a:pPr>
                       <a:r>
-                        <a:rPr lang="en-US" sz="1100" smtClean="0">
+                        <a:rPr lang="en-US" sz="1100" dirty="0" smtClean="0">
                           <a:solidFill>
                             <a:srgbClr val="000000"/>
                           </a:solidFill>
@@ -13932,13 +14013,13 @@
                         </a:rPr>
                         <a:t>890,008 (40.56%)</a:t>
                       </a:r>
-                      <a:endParaRPr lang="en-US" sz="1100" smtClean="0">
+                      <a:endParaRPr lang="en-US" sz="1100" dirty="0" smtClean="0">
                         <a:latin typeface="Calibri" panose="020F0502020204030204" pitchFamily="34" charset="0"/>
                         <a:cs typeface="Calibri" panose="020F0502020204030204" pitchFamily="34" charset="0"/>
                       </a:endParaRPr>
                     </a:p>
                     <a:p>
-                      <a:endParaRPr lang="en-US" sz="1100">
+                      <a:endParaRPr lang="en-US" sz="1100" dirty="0">
                         <a:latin typeface="Calibri" panose="020F0502020204030204" pitchFamily="34" charset="0"/>
                         <a:cs typeface="Calibri" panose="020F0502020204030204" pitchFamily="34" charset="0"/>
                       </a:endParaRPr>
@@ -14549,7 +14630,7 @@
                         <a:defRPr/>
                       </a:pPr>
                       <a:r>
-                        <a:rPr lang="en-US" sz="1100" smtClean="0">
+                        <a:rPr lang="en-US" sz="1100" dirty="0" smtClean="0">
                           <a:solidFill>
                             <a:srgbClr val="000000"/>
                           </a:solidFill>
@@ -14558,13 +14639,13 @@
                         </a:rPr>
                         <a:t>→ UNKNOWN</a:t>
                       </a:r>
-                      <a:endParaRPr lang="en-US" sz="1100" smtClean="0">
+                      <a:endParaRPr lang="en-US" sz="1100" dirty="0" smtClean="0">
                         <a:latin typeface="Calibri" panose="020F0502020204030204" pitchFamily="34" charset="0"/>
                         <a:cs typeface="Calibri" panose="020F0502020204030204" pitchFamily="34" charset="0"/>
                       </a:endParaRPr>
                     </a:p>
                     <a:p>
-                      <a:endParaRPr lang="en-US" sz="1100">
+                      <a:endParaRPr lang="en-US" sz="1100" dirty="0">
                         <a:latin typeface="Calibri" panose="020F0502020204030204" pitchFamily="34" charset="0"/>
                         <a:cs typeface="Calibri" panose="020F0502020204030204" pitchFamily="34" charset="0"/>
                       </a:endParaRPr>
@@ -15649,7 +15730,7 @@
           <a:lstStyle/>
           <a:p>
             <a:pPr algn="ctr"/>
-            <a:endParaRPr lang="en-US" b="1" smtClean="0">
+            <a:endParaRPr lang="en-US" b="1" dirty="0" smtClean="0">
               <a:solidFill>
                 <a:schemeClr val="tx1"/>
               </a:solidFill>
@@ -15660,7 +15741,7 @@
           </a:p>
           <a:p>
             <a:pPr algn="ctr"/>
-            <a:endParaRPr lang="en-US" b="1" smtClean="0">
+            <a:endParaRPr lang="en-US" b="1" dirty="0" smtClean="0">
               <a:solidFill>
                 <a:schemeClr val="tx1"/>
               </a:solidFill>
@@ -15672,7 +15753,7 @@
           <a:p>
             <a:pPr algn="ctr"/>
             <a:r>
-              <a:rPr lang="en-US" b="1" err="1" smtClean="0">
+              <a:rPr lang="en-US" b="1" dirty="0" err="1" smtClean="0">
                 <a:solidFill>
                   <a:schemeClr val="tx1"/>
                 </a:solidFill>
@@ -15682,7 +15763,7 @@
               </a:rPr>
               <a:t>dim_employee</a:t>
             </a:r>
-            <a:endParaRPr lang="en-US" b="1" smtClean="0">
+            <a:endParaRPr lang="en-US" b="1" dirty="0" smtClean="0">
               <a:solidFill>
                 <a:schemeClr val="tx1"/>
               </a:solidFill>
@@ -15693,7 +15774,7 @@
           </a:p>
           <a:p>
             <a:pPr algn="ctr"/>
-            <a:endParaRPr lang="en-US" b="1" smtClean="0">
+            <a:endParaRPr lang="en-US" b="1" dirty="0" smtClean="0">
               <a:solidFill>
                 <a:schemeClr val="tx1"/>
               </a:solidFill>
@@ -15705,7 +15786,7 @@
           <a:p>
             <a:pPr algn="ctr"/>
             <a:r>
-              <a:rPr lang="en-US" sz="1400" smtClean="0">
+              <a:rPr lang="en-US" sz="1400" dirty="0" smtClean="0">
                 <a:solidFill>
                   <a:schemeClr val="tx1"/>
                 </a:solidFill>
@@ -15716,7 +15797,7 @@
               <a:t>WHO</a:t>
             </a:r>
             <a:r>
-              <a:rPr lang="en-US" sz="1400" smtClean="0">
+              <a:rPr lang="en-US" sz="1400" dirty="0" smtClean="0">
                 <a:solidFill>
                   <a:schemeClr val="tx1"/>
                 </a:solidFill>
@@ -15727,7 +15808,7 @@
           <a:p>
             <a:pPr algn="ctr"/>
             <a:r>
-              <a:rPr lang="en-US" sz="1400" err="1" smtClean="0">
+              <a:rPr lang="en-US" sz="1400" dirty="0" err="1" smtClean="0">
                 <a:solidFill>
                   <a:schemeClr val="tx1"/>
                 </a:solidFill>
@@ -15738,7 +15819,7 @@
               <a:t>first_name</a:t>
             </a:r>
             <a:r>
-              <a:rPr lang="en-US" sz="1400">
+              <a:rPr lang="en-US" sz="1400" dirty="0">
                 <a:solidFill>
                   <a:schemeClr val="tx1"/>
                 </a:solidFill>
@@ -15749,7 +15830,7 @@
               <a:t>, </a:t>
             </a:r>
             <a:r>
-              <a:rPr lang="en-US" sz="1400" err="1" smtClean="0">
+              <a:rPr lang="en-US" sz="1400" dirty="0" err="1" smtClean="0">
                 <a:solidFill>
                   <a:schemeClr val="tx1"/>
                 </a:solidFill>
@@ -15759,7 +15840,7 @@
               </a:rPr>
               <a:t>last_name</a:t>
             </a:r>
-            <a:endParaRPr lang="en-US" sz="1400" smtClean="0">
+            <a:endParaRPr lang="en-US" sz="1400" dirty="0" smtClean="0">
               <a:solidFill>
                 <a:schemeClr val="tx1"/>
               </a:solidFill>
@@ -15768,7 +15849,7 @@
           <a:p>
             <a:pPr algn="ctr"/>
             <a:r>
-              <a:rPr lang="en-US" sz="1400" err="1" smtClean="0">
+              <a:rPr lang="en-US" sz="1400" dirty="0" err="1" smtClean="0">
                 <a:solidFill>
                   <a:schemeClr val="tx1"/>
                 </a:solidFill>
@@ -15779,7 +15860,7 @@
               <a:t>leave_statu</a:t>
             </a:r>
             <a:r>
-              <a:rPr lang="en-US" err="1">
+              <a:rPr lang="en-US" dirty="0" err="1">
                 <a:solidFill>
                   <a:schemeClr val="tx1"/>
                 </a:solidFill>
@@ -15789,7 +15870,7 @@
               </a:rPr>
               <a:t>s</a:t>
             </a:r>
-            <a:endParaRPr lang="en-US" smtClean="0">
+            <a:endParaRPr lang="en-US" dirty="0" smtClean="0">
               <a:solidFill>
                 <a:schemeClr val="tx1"/>
               </a:solidFill>
@@ -15797,7 +15878,7 @@
           </a:p>
           <a:p>
             <a:pPr algn="ctr"/>
-            <a:endParaRPr lang="en-US"/>
+            <a:endParaRPr lang="en-US" dirty="0"/>
           </a:p>
         </p:txBody>
       </p:sp>
@@ -16703,7 +16784,7 @@
         </p:blipFill>
         <p:spPr>
           <a:xfrm>
-            <a:off x="736601" y="240739"/>
+            <a:off x="1125221" y="1132279"/>
             <a:ext cx="8216900" cy="5449823"/>
           </a:xfrm>
           <a:prstGeom prst="rect">
@@ -16720,7 +16801,7 @@
         <p:spPr>
           <a:xfrm>
             <a:off x="3640234" y="5949434"/>
-            <a:ext cx="2409634" cy="369332"/>
+            <a:ext cx="2478564" cy="369332"/>
           </a:xfrm>
           <a:prstGeom prst="rect">
             <a:avLst/>
@@ -16734,7 +16815,7 @@
           <a:p>
             <a:r>
               <a:rPr lang="en-US" dirty="0" smtClean="0"/>
-              <a:t>Figure 1:ERD </a:t>
+              <a:t>Figure 1: ERD </a:t>
             </a:r>
             <a:r>
               <a:rPr lang="en-US" dirty="0"/>
@@ -17042,9 +17123,8 @@
             <a:r>
               <a:rPr lang="en-US" dirty="0">
                 <a:solidFill>
-                  <a:schemeClr val="accent2">
-                    <a:lumMod val="20000"/>
-                    <a:lumOff val="80000"/>
+                  <a:schemeClr val="bg1">
+                    <a:lumMod val="95000"/>
                   </a:schemeClr>
                 </a:solidFill>
                 <a:latin typeface="Calibri" pitchFamily="34" charset="0"/>
@@ -17055,9 +17135,8 @@
             </a:r>
             <a:endParaRPr lang="en-US" dirty="0">
               <a:solidFill>
-                <a:schemeClr val="accent2">
-                  <a:lumMod val="20000"/>
-                  <a:lumOff val="80000"/>
+                <a:schemeClr val="bg1">
+                  <a:lumMod val="95000"/>
                 </a:schemeClr>
               </a:solidFill>
             </a:endParaRPr>
@@ -17949,14 +18028,20 @@
           <a:p>
             <a:pPr algn="ctr"/>
             <a:r>
-              <a:rPr lang="en-GB" dirty="0" smtClean="0"/>
+              <a:rPr lang="en-GB" dirty="0" smtClean="0">
+                <a:latin typeface="Calibri" panose="020F0502020204030204" pitchFamily="34" charset="0"/>
+                <a:cs typeface="Calibri" panose="020F0502020204030204" pitchFamily="34" charset="0"/>
+              </a:rPr>
               <a:t>INCREMENTAL</a:t>
             </a:r>
           </a:p>
           <a:p>
             <a:pPr algn="ctr"/>
             <a:r>
-              <a:rPr lang="en-GB" dirty="0" smtClean="0"/>
+              <a:rPr lang="en-GB" dirty="0" smtClean="0">
+                <a:latin typeface="Calibri" panose="020F0502020204030204" pitchFamily="34" charset="0"/>
+                <a:cs typeface="Calibri" panose="020F0502020204030204" pitchFamily="34" charset="0"/>
+              </a:rPr>
               <a:t>LOAD</a:t>
             </a:r>
           </a:p>
